--- a/outputs/OOP_Corridor_Daily_Operations_Report_20260825.pptx
+++ b/outputs/OOP_Corridor_Daily_Operations_Report_20260825.pptx
@@ -1543,7 +1543,7 @@
                 <a:cs typeface="Arial" pitchFamily="34" charset="-120"/>
               </a:rPr>
               <a:t>Ekurhuleni
-25 August 2026 | Tuesday 25 august | 15:00</a:t>
+25 August 2026 | Tuesday 25 August | 15:00</a:t>
             </a:r>
             <a:endParaRPr lang="en-US" sz="1450" dirty="0"/>
           </a:p>
@@ -2280,7 +2280,7 @@
                 <a:ea typeface="Arial" pitchFamily="34" charset="-122"/>
                 <a:cs typeface="Arial" pitchFamily="34" charset="-120"/>
               </a:rPr>
-              <a:t>Use this as the single front page for all corridors. Keep only the six headline measures relevant to management.</a:t>
+              <a:t/>
             </a:r>
             <a:endParaRPr lang="en-US" sz="820" dirty="0"/>
           </a:p>
@@ -2385,7 +2385,7 @@
                 <a:ea typeface="Arial" pitchFamily="34" charset="-122"/>
                 <a:cs typeface="Arial" pitchFamily="34" charset="-120"/>
               </a:rPr>
-              <a:t>Generated from approved corridor template</a:t>
+              <a:t/>
             </a:r>
             <a:endParaRPr lang="en-US" sz="570" dirty="0"/>
           </a:p>
@@ -2709,7 +2709,7 @@
                 <a:ea typeface="Arial" pitchFamily="34" charset="-122"/>
                 <a:cs typeface="Arial" pitchFamily="34" charset="-120"/>
               </a:rPr>
-              <a:t>Generated from approved corridor template</a:t>
+              <a:t/>
             </a:r>
             <a:endParaRPr lang="en-US" sz="570" dirty="0"/>
           </a:p>
@@ -2927,7 +2927,7 @@
                 <a:ea typeface="Arial" pitchFamily="34" charset="-122"/>
                 <a:cs typeface="Arial" pitchFamily="34" charset="-120"/>
               </a:rPr>
-              <a:t>Observed extract: 7,738 records. Prior-close comparison is not supplied.</a:t>
+              <a:t>7,738 records in the supplied extract. Prior-close comparison: 0/0.</a:t>
             </a:r>
             <a:endParaRPr lang="en-US" sz="960" dirty="0"/>
           </a:p>
@@ -3036,7 +3036,7 @@
                 <a:ea typeface="Arial" pitchFamily="34" charset="-122"/>
                 <a:cs typeface="Arial" pitchFamily="34" charset="-120"/>
               </a:rPr>
-              <a:t>0 wards are not represented in the supplied extract. Validate the missing-ward list before circulation.</a:t>
+              <a:t>0 wards are not represented in the supplied extract. Validate the ward register before circulation.</a:t>
             </a:r>
             <a:endParaRPr lang="en-US" sz="960" dirty="0"/>
           </a:p>
@@ -3118,8 +3118,8 @@
         </p:nvSpPr>
         <p:spPr>
           <a:xfrm>
-            <a:off x="822960" y="4206240"/>
-            <a:ext cx="326898" cy="594360"/>
+            <a:off x="822960" y="4023360"/>
+            <a:ext cx="326898" cy="777240"/>
           </a:xfrm>
           <a:prstGeom prst="rect">
             <a:avLst/>
@@ -3152,7 +3152,7 @@
         <p:spPr>
           <a:xfrm>
             <a:off x="1417320" y="4389120"/>
-            <a:ext cx="326898" cy="411480"/>
+            <a:ext cx="326898" cy="0"/>
           </a:xfrm>
           <a:prstGeom prst="rect">
             <a:avLst/>
@@ -3185,7 +3185,7 @@
         <p:spPr>
           <a:xfrm>
             <a:off x="2011680" y="4023360"/>
-            <a:ext cx="326898" cy="777240"/>
+            <a:ext cx="326898" cy="0"/>
           </a:xfrm>
           <a:prstGeom prst="rect">
             <a:avLst/>
@@ -3218,7 +3218,7 @@
         <p:spPr>
           <a:xfrm>
             <a:off x="2606040" y="4507992"/>
-            <a:ext cx="326898" cy="292608"/>
+            <a:ext cx="326898" cy="0"/>
           </a:xfrm>
           <a:prstGeom prst="rect">
             <a:avLst/>
@@ -3251,7 +3251,7 @@
         <p:spPr>
           <a:xfrm>
             <a:off x="3200400" y="4297680"/>
-            <a:ext cx="326898" cy="502920"/>
+            <a:ext cx="326898" cy="0"/>
           </a:xfrm>
           <a:prstGeom prst="rect">
             <a:avLst/>
@@ -3937,7 +3937,7 @@
                 <a:ea typeface="Arial" pitchFamily="34" charset="-122"/>
                 <a:cs typeface="Arial" pitchFamily="34" charset="-120"/>
               </a:rPr>
-              <a:t>[##]</a:t>
+              <a:t>0</a:t>
             </a:r>
             <a:endParaRPr lang="en-US" sz="770" dirty="0"/>
           </a:p>
@@ -3978,7 +3978,7 @@
                 <a:ea typeface="Arial" pitchFamily="34" charset="-122"/>
                 <a:cs typeface="Arial" pitchFamily="34" charset="-120"/>
               </a:rPr>
-              <a:t>[##/target]</a:t>
+              <a:t>112/112</a:t>
             </a:r>
             <a:endParaRPr lang="en-US" sz="770" dirty="0"/>
           </a:p>
@@ -4019,7 +4019,7 @@
                 <a:ea typeface="Arial" pitchFamily="34" charset="-122"/>
                 <a:cs typeface="Arial" pitchFamily="34" charset="-120"/>
               </a:rPr>
-              <a:t>[##]</a:t>
+              <a:t>0</a:t>
             </a:r>
             <a:endParaRPr lang="en-US" sz="770" dirty="0"/>
           </a:p>
@@ -4060,7 +4060,7 @@
                 <a:ea typeface="Arial" pitchFamily="34" charset="-122"/>
                 <a:cs typeface="Arial" pitchFamily="34" charset="-120"/>
               </a:rPr>
-              <a:t>—</a:t>
+              <a:t>0</a:t>
             </a:r>
             <a:endParaRPr lang="en-US" sz="770" dirty="0"/>
           </a:p>
@@ -4101,7 +4101,7 @@
                 <a:ea typeface="Arial" pitchFamily="34" charset="-122"/>
                 <a:cs typeface="Arial" pitchFamily="34" charset="-120"/>
               </a:rPr>
-              <a:t>—</a:t>
+              <a:t>0</a:t>
             </a:r>
             <a:endParaRPr lang="en-US" sz="770" dirty="0"/>
           </a:p>
@@ -4142,7 +4142,7 @@
                 <a:ea typeface="Arial" pitchFamily="34" charset="-122"/>
                 <a:cs typeface="Arial" pitchFamily="34" charset="-120"/>
               </a:rPr>
-              <a:t>[##]</a:t>
+              <a:t>0</a:t>
             </a:r>
             <a:endParaRPr lang="en-US" sz="770" dirty="0"/>
           </a:p>
@@ -4183,7 +4183,7 @@
                 <a:ea typeface="Arial" pitchFamily="34" charset="-122"/>
                 <a:cs typeface="Arial" pitchFamily="34" charset="-120"/>
               </a:rPr>
-              <a:t>[##/target]</a:t>
+              <a:t>0</a:t>
             </a:r>
             <a:endParaRPr lang="en-US" sz="770" dirty="0"/>
           </a:p>
@@ -4224,7 +4224,7 @@
                 <a:ea typeface="Arial" pitchFamily="34" charset="-122"/>
                 <a:cs typeface="Arial" pitchFamily="34" charset="-120"/>
               </a:rPr>
-              <a:t>[##]</a:t>
+              <a:t>0</a:t>
             </a:r>
             <a:endParaRPr lang="en-US" sz="770" dirty="0"/>
           </a:p>
@@ -4265,7 +4265,7 @@
                 <a:ea typeface="Arial" pitchFamily="34" charset="-122"/>
                 <a:cs typeface="Arial" pitchFamily="34" charset="-120"/>
               </a:rPr>
-              <a:t>—</a:t>
+              <a:t>0</a:t>
             </a:r>
             <a:endParaRPr lang="en-US" sz="770" dirty="0"/>
           </a:p>
@@ -4306,7 +4306,7 @@
                 <a:ea typeface="Arial" pitchFamily="34" charset="-122"/>
                 <a:cs typeface="Arial" pitchFamily="34" charset="-120"/>
               </a:rPr>
-              <a:t>—</a:t>
+              <a:t>0</a:t>
             </a:r>
             <a:endParaRPr lang="en-US" sz="770" dirty="0"/>
           </a:p>
@@ -4347,7 +4347,7 @@
                 <a:ea typeface="Arial" pitchFamily="34" charset="-122"/>
                 <a:cs typeface="Arial" pitchFamily="34" charset="-120"/>
               </a:rPr>
-              <a:t>[##]</a:t>
+              <a:t>0</a:t>
             </a:r>
             <a:endParaRPr lang="en-US" sz="770" dirty="0"/>
           </a:p>
@@ -4388,7 +4388,7 @@
                 <a:ea typeface="Arial" pitchFamily="34" charset="-122"/>
                 <a:cs typeface="Arial" pitchFamily="34" charset="-120"/>
               </a:rPr>
-              <a:t>[##/target]</a:t>
+              <a:t>0</a:t>
             </a:r>
             <a:endParaRPr lang="en-US" sz="770" dirty="0"/>
           </a:p>
@@ -4429,7 +4429,7 @@
                 <a:ea typeface="Arial" pitchFamily="34" charset="-122"/>
                 <a:cs typeface="Arial" pitchFamily="34" charset="-120"/>
               </a:rPr>
-              <a:t>[##]</a:t>
+              <a:t>0</a:t>
             </a:r>
             <a:endParaRPr lang="en-US" sz="770" dirty="0"/>
           </a:p>
@@ -4470,7 +4470,7 @@
                 <a:ea typeface="Arial" pitchFamily="34" charset="-122"/>
                 <a:cs typeface="Arial" pitchFamily="34" charset="-120"/>
               </a:rPr>
-              <a:t>—</a:t>
+              <a:t>0</a:t>
             </a:r>
             <a:endParaRPr lang="en-US" sz="770" dirty="0"/>
           </a:p>
@@ -4511,7 +4511,7 @@
                 <a:ea typeface="Arial" pitchFamily="34" charset="-122"/>
                 <a:cs typeface="Arial" pitchFamily="34" charset="-120"/>
               </a:rPr>
-              <a:t>—</a:t>
+              <a:t>0</a:t>
             </a:r>
             <a:endParaRPr lang="en-US" sz="770" dirty="0"/>
           </a:p>
@@ -4552,7 +4552,7 @@
                 <a:ea typeface="Arial" pitchFamily="34" charset="-122"/>
                 <a:cs typeface="Arial" pitchFamily="34" charset="-120"/>
               </a:rPr>
-              <a:t>[##]</a:t>
+              <a:t>0</a:t>
             </a:r>
             <a:endParaRPr lang="en-US" sz="770" dirty="0"/>
           </a:p>
@@ -4593,7 +4593,7 @@
                 <a:ea typeface="Arial" pitchFamily="34" charset="-122"/>
                 <a:cs typeface="Arial" pitchFamily="34" charset="-120"/>
               </a:rPr>
-              <a:t>[target]</a:t>
+              <a:t>0</a:t>
             </a:r>
             <a:endParaRPr lang="en-US" sz="770" dirty="0"/>
           </a:p>
@@ -4711,11 +4711,70 @@
                 <a:ea typeface="Arial" pitchFamily="34" charset="-122"/>
                 <a:cs typeface="Arial" pitchFamily="34" charset="-120"/>
               </a:rPr>
-              <a:t>Validate missing wards against the official register.
+              <a:t>Validate ward representation (0 missing).
 Protect observed peak intake periods.
-Keep detailed exceptions in the addendum.</a:t>
+Use the addendum for detailed evidence.</a:t>
             </a:r>
             <a:endParaRPr lang="en-US" sz="940" dirty="0"/>
+          </a:p>
+        </p:txBody>
+      </p:sp>
+      <p:sp>
+        <p:nvSpPr>
+          <p:cNvPr id="66" name="TextBox 65"/>
+          <p:cNvSpPr txBox="1"/>
+          <p:nvPr/>
+        </p:nvSpPr>
+        <p:spPr>
+          <a:xfrm>
+            <a:off x="777240" y="4736592"/>
+            <a:ext cx="3337560" cy="164592"/>
+          </a:xfrm>
+          <a:prstGeom prst="rect">
+            <a:avLst/>
+          </a:prstGeom>
+          <a:noFill/>
+        </p:spPr>
+        <p:txBody>
+          <a:bodyPr wrap="none">
+            <a:spAutoFit/>
+          </a:bodyPr>
+          <a:lstStyle/>
+          <a:p>
+            <a:pPr algn="ctr"/>
+            <a:r>
+              <a:rPr sz="700"/>
+              <a:t>Reporting date</a:t>
+            </a:r>
+          </a:p>
+        </p:txBody>
+      </p:sp>
+      <p:sp>
+        <p:nvSpPr>
+          <p:cNvPr id="67" name="TextBox 66"/>
+          <p:cNvSpPr txBox="1"/>
+          <p:nvPr/>
+        </p:nvSpPr>
+        <p:spPr>
+          <a:xfrm>
+            <a:off x="777240" y="3840480"/>
+            <a:ext cx="548640" cy="164592"/>
+          </a:xfrm>
+          <a:prstGeom prst="rect">
+            <a:avLst/>
+          </a:prstGeom>
+          <a:noFill/>
+        </p:spPr>
+        <p:txBody>
+          <a:bodyPr wrap="none">
+            <a:spAutoFit/>
+          </a:bodyPr>
+          <a:lstStyle/>
+          <a:p>
+            <a:r>
+              <a:rPr sz="700"/>
+              <a:t>Cases</a:t>
+            </a:r>
           </a:p>
         </p:txBody>
       </p:sp>
@@ -5037,7 +5096,7 @@
                 <a:ea typeface="Arial" pitchFamily="34" charset="-122"/>
                 <a:cs typeface="Arial" pitchFamily="34" charset="-120"/>
               </a:rPr>
-              <a:t>Generated from approved corridor template</a:t>
+              <a:t/>
             </a:r>
             <a:endParaRPr lang="en-US" sz="570" dirty="0"/>
           </a:p>
@@ -5762,7 +5821,7 @@
                 <a:ea typeface="Arial" pitchFamily="34" charset="-122"/>
                 <a:cs typeface="Arial" pitchFamily="34" charset="-120"/>
               </a:rPr>
-              <a:t>—</a:t>
+              <a:t>0</a:t>
             </a:r>
             <a:endParaRPr lang="en-US" sz="800" dirty="0"/>
           </a:p>
@@ -5803,7 +5862,7 @@
                 <a:ea typeface="Arial" pitchFamily="34" charset="-122"/>
                 <a:cs typeface="Arial" pitchFamily="34" charset="-120"/>
               </a:rPr>
-              <a:t>—</a:t>
+              <a:t>0</a:t>
             </a:r>
             <a:endParaRPr lang="en-US" sz="800" dirty="0"/>
           </a:p>
@@ -5844,7 +5903,7 @@
                 <a:ea typeface="Arial" pitchFamily="34" charset="-122"/>
                 <a:cs typeface="Arial" pitchFamily="34" charset="-120"/>
               </a:rPr>
-              <a:t>—</a:t>
+              <a:t>0</a:t>
             </a:r>
             <a:endParaRPr lang="en-US" sz="800" dirty="0"/>
           </a:p>
@@ -5885,7 +5944,7 @@
                 <a:ea typeface="Arial" pitchFamily="34" charset="-122"/>
                 <a:cs typeface="Arial" pitchFamily="34" charset="-120"/>
               </a:rPr>
-              <a:t>—</a:t>
+              <a:t>0</a:t>
             </a:r>
             <a:endParaRPr lang="en-US" sz="800" dirty="0"/>
           </a:p>
@@ -5926,7 +5985,7 @@
                 <a:ea typeface="Arial" pitchFamily="34" charset="-122"/>
                 <a:cs typeface="Arial" pitchFamily="34" charset="-120"/>
               </a:rPr>
-              <a:t>—</a:t>
+              <a:t>0%</a:t>
             </a:r>
             <a:endParaRPr lang="en-US" sz="800" dirty="0"/>
           </a:p>
@@ -5967,7 +6026,7 @@
                 <a:ea typeface="Arial" pitchFamily="34" charset="-122"/>
                 <a:cs typeface="Arial" pitchFamily="34" charset="-120"/>
               </a:rPr>
-              <a:t>—</a:t>
+              <a:t>0</a:t>
             </a:r>
             <a:endParaRPr lang="en-US" sz="800" dirty="0"/>
           </a:p>
@@ -6008,7 +6067,7 @@
                 <a:ea typeface="Arial" pitchFamily="34" charset="-122"/>
                 <a:cs typeface="Arial" pitchFamily="34" charset="-120"/>
               </a:rPr>
-              <a:t>—</a:t>
+              <a:t>0</a:t>
             </a:r>
             <a:endParaRPr lang="en-US" sz="800" dirty="0"/>
           </a:p>
@@ -6049,7 +6108,7 @@
                 <a:ea typeface="Arial" pitchFamily="34" charset="-122"/>
                 <a:cs typeface="Arial" pitchFamily="34" charset="-120"/>
               </a:rPr>
-              <a:t>—</a:t>
+              <a:t>0</a:t>
             </a:r>
             <a:endParaRPr lang="en-US" sz="800" dirty="0"/>
           </a:p>
@@ -6090,7 +6149,7 @@
                 <a:ea typeface="Arial" pitchFamily="34" charset="-122"/>
                 <a:cs typeface="Arial" pitchFamily="34" charset="-120"/>
               </a:rPr>
-              <a:t>—</a:t>
+              <a:t>0</a:t>
             </a:r>
             <a:endParaRPr lang="en-US" sz="800" dirty="0"/>
           </a:p>
@@ -6131,7 +6190,7 @@
                 <a:ea typeface="Arial" pitchFamily="34" charset="-122"/>
                 <a:cs typeface="Arial" pitchFamily="34" charset="-120"/>
               </a:rPr>
-              <a:t>—</a:t>
+              <a:t>0%</a:t>
             </a:r>
             <a:endParaRPr lang="en-US" sz="800" dirty="0"/>
           </a:p>
@@ -6418,8 +6477,8 @@
         </p:nvSpPr>
         <p:spPr>
           <a:xfrm>
-            <a:off x="6309360" y="2633472"/>
-            <a:ext cx="523037" cy="475488"/>
+            <a:off x="6309360" y="2487168"/>
+            <a:ext cx="523037" cy="621792"/>
           </a:xfrm>
           <a:prstGeom prst="rect">
             <a:avLst/>
@@ -6452,7 +6511,7 @@
         <p:spPr>
           <a:xfrm>
             <a:off x="7260336" y="3108960"/>
-            <a:ext cx="523037" cy="1"/>
+            <a:ext cx="523037" cy="0"/>
           </a:xfrm>
           <a:prstGeom prst="rect">
             <a:avLst/>
@@ -6485,7 +6544,7 @@
         <p:spPr>
           <a:xfrm>
             <a:off x="8211312" y="3108960"/>
-            <a:ext cx="523037" cy="1"/>
+            <a:ext cx="523037" cy="0"/>
           </a:xfrm>
           <a:prstGeom prst="rect">
             <a:avLst/>
@@ -6518,7 +6577,7 @@
         <p:spPr>
           <a:xfrm>
             <a:off x="9162288" y="3108960"/>
-            <a:ext cx="523037" cy="1"/>
+            <a:ext cx="523037" cy="0"/>
           </a:xfrm>
           <a:prstGeom prst="rect">
             <a:avLst/>
@@ -6550,8 +6609,8 @@
         </p:nvSpPr>
         <p:spPr>
           <a:xfrm>
-            <a:off x="10113264" y="2706624"/>
-            <a:ext cx="523037" cy="402336"/>
+            <a:off x="10113264" y="2487168"/>
+            <a:ext cx="523037" cy="621792"/>
           </a:xfrm>
           <a:prstGeom prst="rect">
             <a:avLst/>
@@ -6744,7 +6803,7 @@
                 <a:ea typeface="Arial" pitchFamily="34" charset="-122"/>
                 <a:cs typeface="Arial" pitchFamily="34" charset="-120"/>
               </a:rPr>
-              <a:t>Only count wards after numeric Ward ID certification. Do not treat zero-case wards as zero demand; they become the calling queue.</a:t>
+              <a:t>All configured wards are represented in this extract. Missing-ward names require the approved ward master when coverage is below 100%.</a:t>
             </a:r>
             <a:endParaRPr lang="en-US" sz="960" dirty="0"/>
           </a:p>
@@ -6853,9 +6912,68 @@
                 <a:ea typeface="Arial" pitchFamily="34" charset="-122"/>
                 <a:cs typeface="Arial" pitchFamily="34" charset="-120"/>
               </a:rPr>
-              <a:t>The addendum carries the represented-ward evidence. Missing-ward names require an approved ward master/reference list.</a:t>
+              <a:t>The addendum contains the ward evidence and validation trail.</a:t>
             </a:r>
             <a:endParaRPr lang="en-US" sz="960" dirty="0"/>
+          </a:p>
+        </p:txBody>
+      </p:sp>
+      <p:sp>
+        <p:nvSpPr>
+          <p:cNvPr id="61" name="TextBox 60"/>
+          <p:cNvSpPr txBox="1"/>
+          <p:nvPr/>
+        </p:nvSpPr>
+        <p:spPr>
+          <a:xfrm>
+            <a:off x="6172200" y="2999232"/>
+            <a:ext cx="5029200" cy="164592"/>
+          </a:xfrm>
+          <a:prstGeom prst="rect">
+            <a:avLst/>
+          </a:prstGeom>
+          <a:noFill/>
+        </p:spPr>
+        <p:txBody>
+          <a:bodyPr wrap="none">
+            <a:spAutoFit/>
+          </a:bodyPr>
+          <a:lstStyle/>
+          <a:p>
+            <a:pPr algn="ctr"/>
+            <a:r>
+              <a:rPr sz="700"/>
+              <a:t>Area</a:t>
+            </a:r>
+          </a:p>
+        </p:txBody>
+      </p:sp>
+      <p:sp>
+        <p:nvSpPr>
+          <p:cNvPr id="62" name="TextBox 61"/>
+          <p:cNvSpPr txBox="1"/>
+          <p:nvPr/>
+        </p:nvSpPr>
+        <p:spPr>
+          <a:xfrm>
+            <a:off x="6172200" y="2377439"/>
+            <a:ext cx="548640" cy="164592"/>
+          </a:xfrm>
+          <a:prstGeom prst="rect">
+            <a:avLst/>
+          </a:prstGeom>
+          <a:noFill/>
+        </p:spPr>
+        <p:txBody>
+          <a:bodyPr wrap="none">
+            <a:spAutoFit/>
+          </a:bodyPr>
+          <a:lstStyle/>
+          <a:p>
+            <a:r>
+              <a:rPr sz="700"/>
+              <a:t>Wards</a:t>
+            </a:r>
           </a:p>
         </p:txBody>
       </p:sp>
@@ -7177,7 +7295,7 @@
                 <a:ea typeface="Arial" pitchFamily="34" charset="-122"/>
                 <a:cs typeface="Arial" pitchFamily="34" charset="-120"/>
               </a:rPr>
-              <a:t>Generated from approved corridor template</a:t>
+              <a:t/>
             </a:r>
             <a:endParaRPr lang="en-US" sz="570" dirty="0"/>
           </a:p>
@@ -7697,7 +7815,7 @@
                 <a:ea typeface="Arial" pitchFamily="34" charset="-122"/>
                 <a:cs typeface="Arial" pitchFamily="34" charset="-120"/>
               </a:rPr>
-              <a:t>Outbound Call</a:t>
+              <a:t>Outbound</a:t>
             </a:r>
             <a:endParaRPr lang="en-US" sz="750" dirty="0"/>
           </a:p>
@@ -7738,7 +7856,7 @@
                 <a:ea typeface="Arial" pitchFamily="34" charset="-122"/>
                 <a:cs typeface="Arial" pitchFamily="34" charset="-120"/>
               </a:rPr>
-              <a:t>7,288</a:t>
+              <a:t>0</a:t>
             </a:r>
             <a:endParaRPr lang="en-US" sz="750" dirty="0"/>
           </a:p>
@@ -7779,7 +7897,7 @@
                 <a:ea typeface="Arial" pitchFamily="34" charset="-122"/>
                 <a:cs typeface="Arial" pitchFamily="34" charset="-120"/>
               </a:rPr>
-              <a:t>94.2%</a:t>
+              <a:t>0%</a:t>
             </a:r>
             <a:endParaRPr lang="en-US" sz="750" dirty="0"/>
           </a:p>
@@ -7820,7 +7938,7 @@
                 <a:ea typeface="Arial" pitchFamily="34" charset="-122"/>
                 <a:cs typeface="Arial" pitchFamily="34" charset="-120"/>
               </a:rPr>
-              <a:t>—</a:t>
+              <a:t>0</a:t>
             </a:r>
             <a:endParaRPr lang="en-US" sz="750" dirty="0"/>
           </a:p>
@@ -7861,7 +7979,7 @@
                 <a:ea typeface="Arial" pitchFamily="34" charset="-122"/>
                 <a:cs typeface="Arial" pitchFamily="34" charset="-120"/>
               </a:rPr>
-              <a:t>Review timing/coverage</a:t>
+              <a:t>[e.g., primary coverage lever]</a:t>
             </a:r>
             <a:endParaRPr lang="en-US" sz="750" dirty="0"/>
           </a:p>
@@ -7902,7 +8020,7 @@
                 <a:ea typeface="Arial" pitchFamily="34" charset="-122"/>
                 <a:cs typeface="Arial" pitchFamily="34" charset="-120"/>
               </a:rPr>
-              <a:t>Inbound Call</a:t>
+              <a:t>Walk-In</a:t>
             </a:r>
             <a:endParaRPr lang="en-US" sz="750" dirty="0"/>
           </a:p>
@@ -7943,7 +8061,7 @@
                 <a:ea typeface="Arial" pitchFamily="34" charset="-122"/>
                 <a:cs typeface="Arial" pitchFamily="34" charset="-120"/>
               </a:rPr>
-              <a:t>124</a:t>
+              <a:t>0</a:t>
             </a:r>
             <a:endParaRPr lang="en-US" sz="750" dirty="0"/>
           </a:p>
@@ -7984,7 +8102,7 @@
                 <a:ea typeface="Arial" pitchFamily="34" charset="-122"/>
                 <a:cs typeface="Arial" pitchFamily="34" charset="-120"/>
               </a:rPr>
-              <a:t>1.6%</a:t>
+              <a:t>0%</a:t>
             </a:r>
             <a:endParaRPr lang="en-US" sz="750" dirty="0"/>
           </a:p>
@@ -8025,7 +8143,7 @@
                 <a:ea typeface="Arial" pitchFamily="34" charset="-122"/>
                 <a:cs typeface="Arial" pitchFamily="34" charset="-120"/>
               </a:rPr>
-              <a:t>—</a:t>
+              <a:t>Outbound Call</a:t>
             </a:r>
             <a:endParaRPr lang="en-US" sz="750" dirty="0"/>
           </a:p>
@@ -8066,7 +8184,7 @@
                 <a:ea typeface="Arial" pitchFamily="34" charset="-122"/>
                 <a:cs typeface="Arial" pitchFamily="34" charset="-120"/>
               </a:rPr>
-              <a:t>Review timing/coverage</a:t>
+              <a:t>7,288</a:t>
             </a:r>
             <a:endParaRPr lang="en-US" sz="750" dirty="0"/>
           </a:p>
@@ -8107,7 +8225,7 @@
                 <a:ea typeface="Arial" pitchFamily="34" charset="-122"/>
                 <a:cs typeface="Arial" pitchFamily="34" charset="-120"/>
               </a:rPr>
-              <a:t>Email</a:t>
+              <a:t>94.2%</a:t>
             </a:r>
             <a:endParaRPr lang="en-US" sz="750" dirty="0"/>
           </a:p>
@@ -8148,7 +8266,7 @@
                 <a:ea typeface="Arial" pitchFamily="34" charset="-122"/>
                 <a:cs typeface="Arial" pitchFamily="34" charset="-120"/>
               </a:rPr>
-              <a:t>97</a:t>
+              <a:t>Demand concentration</a:t>
             </a:r>
             <a:endParaRPr lang="en-US" sz="750" dirty="0"/>
           </a:p>
@@ -8189,7 +8307,7 @@
                 <a:ea typeface="Arial" pitchFamily="34" charset="-122"/>
                 <a:cs typeface="Arial" pitchFamily="34" charset="-120"/>
               </a:rPr>
-              <a:t>1.2%</a:t>
+              <a:t>Inbound Call</a:t>
             </a:r>
             <a:endParaRPr lang="en-US" sz="750" dirty="0"/>
           </a:p>
@@ -8230,7 +8348,7 @@
                 <a:ea typeface="Arial" pitchFamily="34" charset="-122"/>
                 <a:cs typeface="Arial" pitchFamily="34" charset="-120"/>
               </a:rPr>
-              <a:t>—</a:t>
+              <a:t>124</a:t>
             </a:r>
             <a:endParaRPr lang="en-US" sz="750" dirty="0"/>
           </a:p>
@@ -8271,7 +8389,7 @@
                 <a:ea typeface="Arial" pitchFamily="34" charset="-122"/>
                 <a:cs typeface="Arial" pitchFamily="34" charset="-120"/>
               </a:rPr>
-              <a:t>Review timing/coverage</a:t>
+              <a:t>1.6%</a:t>
             </a:r>
             <a:endParaRPr lang="en-US" sz="750" dirty="0"/>
           </a:p>
@@ -8312,7 +8430,7 @@
                 <a:ea typeface="Arial" pitchFamily="34" charset="-122"/>
                 <a:cs typeface="Arial" pitchFamily="34" charset="-120"/>
               </a:rPr>
-              <a:t>Walk-In</a:t>
+              <a:t>Monitor mix</a:t>
             </a:r>
             <a:endParaRPr lang="en-US" sz="750" dirty="0"/>
           </a:p>
@@ -8353,7 +8471,7 @@
                 <a:ea typeface="Arial" pitchFamily="34" charset="-122"/>
                 <a:cs typeface="Arial" pitchFamily="34" charset="-120"/>
               </a:rPr>
-              <a:t>94</a:t>
+              <a:t>Email</a:t>
             </a:r>
             <a:endParaRPr lang="en-US" sz="750" dirty="0"/>
           </a:p>
@@ -8394,7 +8512,7 @@
                 <a:ea typeface="Arial" pitchFamily="34" charset="-122"/>
                 <a:cs typeface="Arial" pitchFamily="34" charset="-120"/>
               </a:rPr>
-              <a:t>1.2%</a:t>
+              <a:t>97</a:t>
             </a:r>
             <a:endParaRPr lang="en-US" sz="750" dirty="0"/>
           </a:p>
@@ -8435,7 +8553,7 @@
                 <a:ea typeface="Arial" pitchFamily="34" charset="-122"/>
                 <a:cs typeface="Arial" pitchFamily="34" charset="-120"/>
               </a:rPr>
-              <a:t>—</a:t>
+              <a:t>1.2%</a:t>
             </a:r>
             <a:endParaRPr lang="en-US" sz="750" dirty="0"/>
           </a:p>
@@ -8476,7 +8594,7 @@
                 <a:ea typeface="Arial" pitchFamily="34" charset="-122"/>
                 <a:cs typeface="Arial" pitchFamily="34" charset="-120"/>
               </a:rPr>
-              <a:t>Review timing/coverage</a:t>
+              <a:t>Walk-In</a:t>
             </a:r>
             <a:endParaRPr lang="en-US" sz="750" dirty="0"/>
           </a:p>
@@ -8508,7 +8626,11 @@
         </p:spPr>
         <p:txBody>
           <a:bodyPr/>
-          <a:p/>
+          <a:p>
+            <a:r>
+              <a:t>94</a:t>
+            </a:r>
+          </a:p>
         </p:txBody>
       </p:sp>
       <p:sp>
@@ -8544,7 +8666,7 @@
                 <a:ea typeface="Arial" pitchFamily="34" charset="-122"/>
                 <a:cs typeface="Arial" pitchFamily="34" charset="-120"/>
               </a:rPr>
-              <a:t>Channel mix</a:t>
+              <a:t>1.2%</a:t>
             </a:r>
             <a:endParaRPr lang="en-US" sz="1080" dirty="0"/>
           </a:p>
@@ -8558,8 +8680,8 @@
         </p:nvSpPr>
         <p:spPr>
           <a:xfrm>
-            <a:off x="6675120" y="2633472"/>
-            <a:ext cx="482803" cy="475488"/>
+            <a:off x="6675120" y="2487168"/>
+            <a:ext cx="482803" cy="621792"/>
           </a:xfrm>
           <a:prstGeom prst="rect">
             <a:avLst/>
@@ -8580,7 +8702,11 @@
         </p:spPr>
         <p:txBody>
           <a:bodyPr/>
-          <a:p/>
+          <a:p>
+            <a:r>
+              <a:t>Monitor mix</a:t>
+            </a:r>
+          </a:p>
         </p:txBody>
       </p:sp>
       <p:sp>
@@ -8591,8 +8717,8 @@
         </p:nvSpPr>
         <p:spPr>
           <a:xfrm>
-            <a:off x="7552944" y="3103360"/>
-            <a:ext cx="482803" cy="5600"/>
+            <a:off x="7552944" y="3098381"/>
+            <a:ext cx="482803" cy="10579"/>
           </a:xfrm>
           <a:prstGeom prst="rect">
             <a:avLst/>
@@ -8657,8 +8783,8 @@
         </p:nvSpPr>
         <p:spPr>
           <a:xfrm>
-            <a:off x="9308592" y="3105941"/>
-            <a:ext cx="482803" cy="3019"/>
+            <a:off x="9308592" y="3100941"/>
+            <a:ext cx="482803" cy="8019"/>
           </a:xfrm>
           <a:prstGeom prst="rect">
             <a:avLst/>
@@ -8690,8 +8816,8 @@
         </p:nvSpPr>
         <p:spPr>
           <a:xfrm>
-            <a:off x="10186416" y="3106476"/>
-            <a:ext cx="482803" cy="2484"/>
+            <a:off x="10186416" y="3105121"/>
+            <a:ext cx="482803" cy="3839"/>
           </a:xfrm>
           <a:prstGeom prst="rect">
             <a:avLst/>
@@ -8739,7 +8865,11 @@
         </p:spPr>
         <p:txBody>
           <a:bodyPr/>
-          <a:p/>
+          <a:p>
+            <a:r>
+              <a:t>Channel mix</a:t>
+            </a:r>
+          </a:p>
         </p:txBody>
       </p:sp>
       <p:sp>
@@ -8775,7 +8905,7 @@
                 <a:ea typeface="Arial" pitchFamily="34" charset="-122"/>
                 <a:cs typeface="Arial" pitchFamily="34" charset="-120"/>
               </a:rPr>
-              <a:t>Channel mix</a:t>
+              <a:t/>
             </a:r>
             <a:endParaRPr lang="en-US" sz="660" dirty="0"/>
           </a:p>
@@ -8857,8 +8987,8 @@
         </p:nvSpPr>
         <p:spPr>
           <a:xfrm>
-            <a:off x="822960" y="4874606"/>
-            <a:ext cx="523037" cy="136306"/>
+            <a:off x="822960" y="4908078"/>
+            <a:ext cx="523037" cy="102834"/>
           </a:xfrm>
           <a:prstGeom prst="rect">
             <a:avLst/>
@@ -8890,8 +9020,8 @@
         </p:nvSpPr>
         <p:spPr>
           <a:xfrm>
-            <a:off x="1773936" y="4940138"/>
-            <a:ext cx="523037" cy="70774"/>
+            <a:off x="1773936" y="4818097"/>
+            <a:ext cx="523037" cy="192815"/>
           </a:xfrm>
           <a:prstGeom prst="rect">
             <a:avLst/>
@@ -8923,8 +9053,8 @@
         </p:nvSpPr>
         <p:spPr>
           <a:xfrm>
-            <a:off x="2724912" y="4676699"/>
-            <a:ext cx="523037" cy="334213"/>
+            <a:off x="2724912" y="4895223"/>
+            <a:ext cx="523037" cy="115689"/>
           </a:xfrm>
           <a:prstGeom prst="rect">
             <a:avLst/>
@@ -8956,8 +9086,8 @@
         </p:nvSpPr>
         <p:spPr>
           <a:xfrm>
-            <a:off x="3675888" y="4935420"/>
-            <a:ext cx="523037" cy="75492"/>
+            <a:off x="3675888" y="4676699"/>
+            <a:ext cx="523037" cy="334213"/>
           </a:xfrm>
           <a:prstGeom prst="rect">
             <a:avLst/>
@@ -8989,8 +9119,8 @@
         </p:nvSpPr>
         <p:spPr>
           <a:xfrm>
-            <a:off x="4626864" y="4909993"/>
-            <a:ext cx="523037" cy="100919"/>
+            <a:off x="4626864" y="4728117"/>
+            <a:ext cx="523037" cy="282795"/>
           </a:xfrm>
           <a:prstGeom prst="rect">
             <a:avLst/>
@@ -9074,7 +9204,7 @@
                 <a:ea typeface="Arial" pitchFamily="34" charset="-122"/>
                 <a:cs typeface="Arial" pitchFamily="34" charset="-120"/>
               </a:rPr>
-              <a:t>Observed case-creation activity</a:t>
+              <a:t/>
             </a:r>
             <a:endParaRPr lang="en-US" sz="660" dirty="0"/>
           </a:p>
@@ -9183,9 +9313,127 @@
                 <a:ea typeface="Arial" pitchFamily="34" charset="-122"/>
                 <a:cs typeface="Arial" pitchFamily="34" charset="-120"/>
               </a:rPr>
-              <a:t>Show only actionable timing patterns: peak intake hours, quiet periods, missed afternoon coverage, and the next calling window. Keep row-level time logs in the addendum.</a:t>
+              <a:t>Observed window: 07:06–14:31. Peak: 13:00 (26 cases).</a:t>
             </a:r>
             <a:endParaRPr lang="en-US" sz="960" dirty="0"/>
+          </a:p>
+        </p:txBody>
+      </p:sp>
+      <p:sp>
+        <p:nvSpPr>
+          <p:cNvPr id="67" name="TextBox 66"/>
+          <p:cNvSpPr txBox="1"/>
+          <p:nvPr/>
+        </p:nvSpPr>
+        <p:spPr>
+          <a:xfrm>
+            <a:off x="6172200" y="2999232"/>
+            <a:ext cx="5029200" cy="164592"/>
+          </a:xfrm>
+          <a:prstGeom prst="rect">
+            <a:avLst/>
+          </a:prstGeom>
+          <a:noFill/>
+        </p:spPr>
+        <p:txBody>
+          <a:bodyPr wrap="none">
+            <a:spAutoFit/>
+          </a:bodyPr>
+          <a:lstStyle/>
+          <a:p>
+            <a:pPr algn="ctr"/>
+            <a:r>
+              <a:rPr sz="700"/>
+              <a:t>Channel</a:t>
+            </a:r>
+          </a:p>
+        </p:txBody>
+      </p:sp>
+      <p:sp>
+        <p:nvSpPr>
+          <p:cNvPr id="68" name="TextBox 67"/>
+          <p:cNvSpPr txBox="1"/>
+          <p:nvPr/>
+        </p:nvSpPr>
+        <p:spPr>
+          <a:xfrm>
+            <a:off x="6172200" y="2377439"/>
+            <a:ext cx="548640" cy="164592"/>
+          </a:xfrm>
+          <a:prstGeom prst="rect">
+            <a:avLst/>
+          </a:prstGeom>
+          <a:noFill/>
+        </p:spPr>
+        <p:txBody>
+          <a:bodyPr wrap="none">
+            <a:spAutoFit/>
+          </a:bodyPr>
+          <a:lstStyle/>
+          <a:p>
+            <a:r>
+              <a:rPr sz="700"/>
+              <a:t>Cases</a:t>
+            </a:r>
+          </a:p>
+        </p:txBody>
+      </p:sp>
+      <p:sp>
+        <p:nvSpPr>
+          <p:cNvPr id="69" name="TextBox 68"/>
+          <p:cNvSpPr txBox="1"/>
+          <p:nvPr/>
+        </p:nvSpPr>
+        <p:spPr>
+          <a:xfrm>
+            <a:off x="685800" y="4370832"/>
+            <a:ext cx="5120640" cy="164592"/>
+          </a:xfrm>
+          <a:prstGeom prst="rect">
+            <a:avLst/>
+          </a:prstGeom>
+          <a:noFill/>
+        </p:spPr>
+        <p:txBody>
+          <a:bodyPr wrap="none">
+            <a:spAutoFit/>
+          </a:bodyPr>
+          <a:lstStyle/>
+          <a:p>
+            <a:pPr algn="ctr"/>
+            <a:r>
+              <a:rPr sz="700"/>
+              <a:t>Hour of day</a:t>
+            </a:r>
+          </a:p>
+        </p:txBody>
+      </p:sp>
+      <p:sp>
+        <p:nvSpPr>
+          <p:cNvPr id="70" name="TextBox 69"/>
+          <p:cNvSpPr txBox="1"/>
+          <p:nvPr/>
+        </p:nvSpPr>
+        <p:spPr>
+          <a:xfrm>
+            <a:off x="685800" y="3703320"/>
+            <a:ext cx="548640" cy="164592"/>
+          </a:xfrm>
+          <a:prstGeom prst="rect">
+            <a:avLst/>
+          </a:prstGeom>
+          <a:noFill/>
+        </p:spPr>
+        <p:txBody>
+          <a:bodyPr wrap="none">
+            <a:spAutoFit/>
+          </a:bodyPr>
+          <a:lstStyle/>
+          <a:p>
+            <a:r>
+              <a:rPr sz="700"/>
+              <a:t>Cases</a:t>
+            </a:r>
           </a:p>
         </p:txBody>
       </p:sp>
@@ -9507,7 +9755,7 @@
                 <a:ea typeface="Arial" pitchFamily="34" charset="-122"/>
                 <a:cs typeface="Arial" pitchFamily="34" charset="-120"/>
               </a:rPr>
-              <a:t>Generated from approved corridor template</a:t>
+              <a:t/>
             </a:r>
             <a:endParaRPr lang="en-US" sz="570" dirty="0"/>
           </a:p>
@@ -9589,8 +9837,8 @@
         </p:nvSpPr>
         <p:spPr>
           <a:xfrm>
-            <a:off x="822960" y="2681478"/>
-            <a:ext cx="452628" cy="564642"/>
+            <a:off x="822960" y="2507742"/>
+            <a:ext cx="452628" cy="738378"/>
           </a:xfrm>
           <a:prstGeom prst="rect">
             <a:avLst/>
@@ -9622,8 +9870,8 @@
         </p:nvSpPr>
         <p:spPr>
           <a:xfrm>
-            <a:off x="1645920" y="2995922"/>
-            <a:ext cx="452628" cy="250198"/>
+            <a:off x="1645920" y="2773524"/>
+            <a:ext cx="452628" cy="472596"/>
           </a:xfrm>
           <a:prstGeom prst="rect">
             <a:avLst/>
@@ -9688,8 +9936,8 @@
         </p:nvSpPr>
         <p:spPr>
           <a:xfrm>
-            <a:off x="3291840" y="3151938"/>
-            <a:ext cx="452628" cy="94182"/>
+            <a:off x="3291840" y="2995948"/>
+            <a:ext cx="452628" cy="250172"/>
           </a:xfrm>
           <a:prstGeom prst="rect">
             <a:avLst/>
@@ -9721,8 +9969,8 @@
         </p:nvSpPr>
         <p:spPr>
           <a:xfrm>
-            <a:off x="4114800" y="3152417"/>
-            <a:ext cx="452628" cy="93703"/>
+            <a:off x="4114800" y="3101306"/>
+            <a:ext cx="452628" cy="144814"/>
           </a:xfrm>
           <a:prstGeom prst="rect">
             <a:avLst/>
@@ -9806,7 +10054,7 @@
                 <a:ea typeface="Arial" pitchFamily="34" charset="-122"/>
                 <a:cs typeface="Arial" pitchFamily="34" charset="-120"/>
               </a:rPr>
-              <a:t>Top demand categories</a:t>
+              <a:t>Top service-demand categories by cases</a:t>
             </a:r>
             <a:endParaRPr lang="en-US" sz="660" dirty="0"/>
           </a:p>
@@ -10381,7 +10629,7 @@
                 <a:ea typeface="Arial" pitchFamily="34" charset="-122"/>
                 <a:cs typeface="Arial" pitchFamily="34" charset="-120"/>
               </a:rPr>
-              <a:t>Demand indicator</a:t>
+              <a:t>Leading demand category</a:t>
             </a:r>
             <a:endParaRPr lang="en-US" sz="790" dirty="0"/>
           </a:p>
@@ -10791,7 +11039,7 @@
                 <a:ea typeface="Arial" pitchFamily="34" charset="-122"/>
                 <a:cs typeface="Arial" pitchFamily="34" charset="-120"/>
               </a:rPr>
-              <a:t>[##]</a:t>
+              <a:t>2,896</a:t>
             </a:r>
             <a:endParaRPr lang="en-US" sz="790" dirty="0"/>
           </a:p>
@@ -10832,7 +11080,7 @@
                 <a:ea typeface="Arial" pitchFamily="34" charset="-122"/>
                 <a:cs typeface="Arial" pitchFamily="34" charset="-120"/>
               </a:rPr>
-              <a:t>[##%]</a:t>
+              <a:t>42.8%</a:t>
             </a:r>
             <a:endParaRPr lang="en-US" sz="790" dirty="0"/>
           </a:p>
@@ -10873,7 +11121,7 @@
                 <a:ea typeface="Arial" pitchFamily="34" charset="-122"/>
                 <a:cs typeface="Arial" pitchFamily="34" charset="-120"/>
               </a:rPr>
-              <a:t>[summary]</a:t>
+              <a:t>Remaining categories</a:t>
             </a:r>
             <a:endParaRPr lang="en-US" sz="790" dirty="0"/>
           </a:p>
@@ -10982,7 +11230,7 @@
                 <a:ea typeface="Arial" pitchFamily="34" charset="-122"/>
                 <a:cs typeface="Arial" pitchFamily="34" charset="-120"/>
               </a:rPr>
-              <a:t>Report demand indicators, not departmental performance. Avoid long service lists on the main slide; put detailed service tables in the addendum.</a:t>
+              <a:t>Use demand concentration to target follow-up; do not interpret case volume as departmental performance.</a:t>
             </a:r>
             <a:endParaRPr lang="en-US" sz="960" dirty="0"/>
           </a:p>
@@ -11091,9 +11339,68 @@
                 <a:ea typeface="Arial" pitchFamily="34" charset="-122"/>
                 <a:cs typeface="Arial" pitchFamily="34" charset="-120"/>
               </a:rPr>
-              <a:t>Use the addendum for low-volume services and single-service ward follow-up.</a:t>
+              <a:t>Use the addendum for low-volume services and ward-level detail.</a:t>
             </a:r>
             <a:endParaRPr lang="en-US" sz="960" dirty="0"/>
+          </a:p>
+        </p:txBody>
+      </p:sp>
+      <p:sp>
+        <p:nvSpPr>
+          <p:cNvPr id="55" name="TextBox 54"/>
+          <p:cNvSpPr txBox="1"/>
+          <p:nvPr/>
+        </p:nvSpPr>
+        <p:spPr>
+          <a:xfrm>
+            <a:off x="685800" y="2999232"/>
+            <a:ext cx="4297680" cy="164592"/>
+          </a:xfrm>
+          <a:prstGeom prst="rect">
+            <a:avLst/>
+          </a:prstGeom>
+          <a:noFill/>
+        </p:spPr>
+        <p:txBody>
+          <a:bodyPr wrap="none">
+            <a:spAutoFit/>
+          </a:bodyPr>
+          <a:lstStyle/>
+          <a:p>
+            <a:pPr algn="ctr"/>
+            <a:r>
+              <a:rPr sz="700"/>
+              <a:t>Service category</a:t>
+            </a:r>
+          </a:p>
+        </p:txBody>
+      </p:sp>
+      <p:sp>
+        <p:nvSpPr>
+          <p:cNvPr id="56" name="TextBox 55"/>
+          <p:cNvSpPr txBox="1"/>
+          <p:nvPr/>
+        </p:nvSpPr>
+        <p:spPr>
+          <a:xfrm>
+            <a:off x="685800" y="2377439"/>
+            <a:ext cx="548640" cy="164592"/>
+          </a:xfrm>
+          <a:prstGeom prst="rect">
+            <a:avLst/>
+          </a:prstGeom>
+          <a:noFill/>
+        </p:spPr>
+        <p:txBody>
+          <a:bodyPr wrap="none">
+            <a:spAutoFit/>
+          </a:bodyPr>
+          <a:lstStyle/>
+          <a:p>
+            <a:r>
+              <a:rPr sz="700"/>
+              <a:t>Cases</a:t>
+            </a:r>
           </a:p>
         </p:txBody>
       </p:sp>
@@ -11415,7 +11722,7 @@
                 <a:ea typeface="Arial" pitchFamily="34" charset="-122"/>
                 <a:cs typeface="Arial" pitchFamily="34" charset="-120"/>
               </a:rPr>
-              <a:t>Generated from approved corridor template</a:t>
+              <a:t/>
             </a:r>
             <a:endParaRPr lang="en-US" sz="570" dirty="0"/>
           </a:p>
@@ -12420,7 +12727,7 @@
                 <a:ea typeface="Arial" pitchFamily="34" charset="-122"/>
                 <a:cs typeface="Arial" pitchFamily="34" charset="-120"/>
               </a:rPr>
-              <a:t>[Case ref]</a:t>
+              <a:t>0</a:t>
             </a:r>
             <a:endParaRPr lang="en-US" sz="790" dirty="0"/>
           </a:p>
@@ -12461,7 +12768,7 @@
                 <a:ea typeface="Arial" pitchFamily="34" charset="-122"/>
                 <a:cs typeface="Arial" pitchFamily="34" charset="-120"/>
               </a:rPr>
-              <a:t>[Ward]</a:t>
+              <a:t>0</a:t>
             </a:r>
             <a:endParaRPr lang="en-US" sz="790" dirty="0"/>
           </a:p>
@@ -12502,7 +12809,7 @@
                 <a:ea typeface="Arial" pitchFamily="34" charset="-122"/>
                 <a:cs typeface="Arial" pitchFamily="34" charset="-120"/>
               </a:rPr>
-              <a:t>[Service]</a:t>
+              <a:t>Not available</a:t>
             </a:r>
             <a:endParaRPr lang="en-US" sz="790" dirty="0"/>
           </a:p>
@@ -12543,7 +12850,7 @@
                 <a:ea typeface="Arial" pitchFamily="34" charset="-122"/>
                 <a:cs typeface="Arial" pitchFamily="34" charset="-120"/>
               </a:rPr>
-              <a:t>[Call / verify / close]</a:t>
+              <a:t>Call / verify / close</a:t>
             </a:r>
             <a:endParaRPr lang="en-US" sz="790" dirty="0"/>
           </a:p>
@@ -12584,7 +12891,7 @@
                 <a:ea typeface="Arial" pitchFamily="34" charset="-122"/>
                 <a:cs typeface="Arial" pitchFamily="34" charset="-120"/>
               </a:rPr>
-              <a:t>[Case ref]</a:t>
+              <a:t>0</a:t>
             </a:r>
             <a:endParaRPr lang="en-US" sz="790" dirty="0"/>
           </a:p>
@@ -12625,7 +12932,7 @@
                 <a:ea typeface="Arial" pitchFamily="34" charset="-122"/>
                 <a:cs typeface="Arial" pitchFamily="34" charset="-120"/>
               </a:rPr>
-              <a:t>[Ward]</a:t>
+              <a:t>0</a:t>
             </a:r>
             <a:endParaRPr lang="en-US" sz="790" dirty="0"/>
           </a:p>
@@ -12666,7 +12973,7 @@
                 <a:ea typeface="Arial" pitchFamily="34" charset="-122"/>
                 <a:cs typeface="Arial" pitchFamily="34" charset="-120"/>
               </a:rPr>
-              <a:t>[Service]</a:t>
+              <a:t>Not available</a:t>
             </a:r>
             <a:endParaRPr lang="en-US" sz="790" dirty="0"/>
           </a:p>
@@ -12707,7 +13014,7 @@
                 <a:ea typeface="Arial" pitchFamily="34" charset="-122"/>
                 <a:cs typeface="Arial" pitchFamily="34" charset="-120"/>
               </a:rPr>
-              <a:t>[Call / verify / close]</a:t>
+              <a:t>Call / verify / close</a:t>
             </a:r>
             <a:endParaRPr lang="en-US" sz="790" dirty="0"/>
           </a:p>
@@ -12748,7 +13055,7 @@
                 <a:ea typeface="Arial" pitchFamily="34" charset="-122"/>
                 <a:cs typeface="Arial" pitchFamily="34" charset="-120"/>
               </a:rPr>
-              <a:t>[Case ref]</a:t>
+              <a:t>0</a:t>
             </a:r>
             <a:endParaRPr lang="en-US" sz="790" dirty="0"/>
           </a:p>
@@ -12789,7 +13096,7 @@
                 <a:ea typeface="Arial" pitchFamily="34" charset="-122"/>
                 <a:cs typeface="Arial" pitchFamily="34" charset="-120"/>
               </a:rPr>
-              <a:t>[Ward]</a:t>
+              <a:t>0</a:t>
             </a:r>
             <a:endParaRPr lang="en-US" sz="790" dirty="0"/>
           </a:p>
@@ -12830,7 +13137,7 @@
                 <a:ea typeface="Arial" pitchFamily="34" charset="-122"/>
                 <a:cs typeface="Arial" pitchFamily="34" charset="-120"/>
               </a:rPr>
-              <a:t>[Service]</a:t>
+              <a:t>Not available</a:t>
             </a:r>
             <a:endParaRPr lang="en-US" sz="790" dirty="0"/>
           </a:p>
@@ -12871,7 +13178,7 @@
                 <a:ea typeface="Arial" pitchFamily="34" charset="-122"/>
                 <a:cs typeface="Arial" pitchFamily="34" charset="-120"/>
               </a:rPr>
-              <a:t>[Call / verify / close]</a:t>
+              <a:t>Call / verify / close</a:t>
             </a:r>
             <a:endParaRPr lang="en-US" sz="790" dirty="0"/>
           </a:p>
@@ -12980,7 +13287,7 @@
                 <a:ea typeface="Arial" pitchFamily="34" charset="-122"/>
                 <a:cs typeface="Arial" pitchFamily="34" charset="-120"/>
               </a:rPr>
-              <a:t>VOC source supplied. Metrics shown are calculated only where the response fields support them; detailed responses remain in the addendum.</a:t>
+              <a:t>VOC source supplied. Metrics are calculated only from supported response fields; detailed responses remain in the addendum.</a:t>
             </a:r>
             <a:endParaRPr lang="en-US" sz="960" dirty="0"/>
           </a:p>
@@ -13304,7 +13611,7 @@
                 <a:ea typeface="Arial" pitchFamily="34" charset="-122"/>
                 <a:cs typeface="Arial" pitchFamily="34" charset="-120"/>
               </a:rPr>
-              <a:t>Generated from approved corridor template</a:t>
+              <a:t/>
             </a:r>
             <a:endParaRPr lang="en-US" sz="570" dirty="0"/>
           </a:p>
@@ -14166,7 +14473,7 @@
                 <a:ea typeface="Arial" pitchFamily="34" charset="-122"/>
                 <a:cs typeface="Arial" pitchFamily="34" charset="-120"/>
               </a:rPr>
-              <a:t>When VOC source is supplied</a:t>
+              <a:t>Current period</a:t>
             </a:r>
             <a:endParaRPr lang="en-US" sz="800" dirty="0"/>
           </a:p>
@@ -14207,7 +14514,7 @@
                 <a:ea typeface="Arial" pitchFamily="34" charset="-122"/>
                 <a:cs typeface="Arial" pitchFamily="34" charset="-120"/>
               </a:rPr>
-              <a:t>VOC-ready dataset</a:t>
+              <a:t>33 VOC responses reviewed</a:t>
             </a:r>
             <a:endParaRPr lang="en-US" sz="800" dirty="0"/>
           </a:p>
@@ -14454,7 +14761,7 @@
         <p:spPr>
           <a:xfrm>
             <a:off x="6949440" y="3566160"/>
-            <a:ext cx="442570" cy="1"/>
+            <a:ext cx="442570" cy="0"/>
           </a:xfrm>
           <a:prstGeom prst="rect">
             <a:avLst/>
@@ -14486,8 +14793,8 @@
         </p:nvSpPr>
         <p:spPr>
           <a:xfrm>
-            <a:off x="7754112" y="3550574"/>
-            <a:ext cx="442570" cy="15586"/>
+            <a:off x="7754112" y="3536720"/>
+            <a:ext cx="442570" cy="29440"/>
           </a:xfrm>
           <a:prstGeom prst="rect">
             <a:avLst/>
@@ -14552,8 +14859,8 @@
         </p:nvSpPr>
         <p:spPr>
           <a:xfrm>
-            <a:off x="9363456" y="3521826"/>
-            <a:ext cx="442570" cy="44334"/>
+            <a:off x="9363456" y="3448397"/>
+            <a:ext cx="442570" cy="117763"/>
           </a:xfrm>
           <a:prstGeom prst="rect">
             <a:avLst/>
@@ -14585,8 +14892,8 @@
         </p:nvSpPr>
         <p:spPr>
           <a:xfrm>
-            <a:off x="10168128" y="3547110"/>
-            <a:ext cx="442570" cy="19050"/>
+            <a:off x="10168128" y="3536720"/>
+            <a:ext cx="442570" cy="29440"/>
           </a:xfrm>
           <a:prstGeom prst="rect">
             <a:avLst/>
@@ -14670,7 +14977,7 @@
                 <a:ea typeface="Arial" pitchFamily="34" charset="-122"/>
                 <a:cs typeface="Arial" pitchFamily="34" charset="-120"/>
               </a:rPr>
-              <a:t>Replace with missing wards, VOC queue and key data exceptions.</a:t>
+              <a:t/>
             </a:r>
             <a:endParaRPr lang="en-US" sz="660" dirty="0"/>
           </a:p>
@@ -14997,9 +15304,68 @@
                 <a:ea typeface="Arial" pitchFamily="34" charset="-122"/>
                 <a:cs typeface="Arial" pitchFamily="34" charset="-120"/>
               </a:rPr>
-              <a:t>Detailed graphs, ward evidence, time logs, VOC evidence and QA registers are in the analytical addendum.</a:t>
+              <a:t>Detailed graphs, accounted wards, missing wards, time logs and correction registers are attached separately.</a:t>
             </a:r>
             <a:endParaRPr lang="en-US" sz="960" dirty="0"/>
+          </a:p>
+        </p:txBody>
+      </p:sp>
+      <p:sp>
+        <p:nvSpPr>
+          <p:cNvPr id="58" name="TextBox 57"/>
+          <p:cNvSpPr txBox="1"/>
+          <p:nvPr/>
+        </p:nvSpPr>
+        <p:spPr>
+          <a:xfrm>
+            <a:off x="6812280" y="2999232"/>
+            <a:ext cx="4389120" cy="164592"/>
+          </a:xfrm>
+          <a:prstGeom prst="rect">
+            <a:avLst/>
+          </a:prstGeom>
+          <a:noFill/>
+        </p:spPr>
+        <p:txBody>
+          <a:bodyPr wrap="none">
+            <a:spAutoFit/>
+          </a:bodyPr>
+          <a:lstStyle/>
+          <a:p>
+            <a:pPr algn="ctr"/>
+            <a:r>
+              <a:rPr sz="700"/>
+              <a:t>Control area</a:t>
+            </a:r>
+          </a:p>
+        </p:txBody>
+      </p:sp>
+      <p:sp>
+        <p:nvSpPr>
+          <p:cNvPr id="59" name="TextBox 58"/>
+          <p:cNvSpPr txBox="1"/>
+          <p:nvPr/>
+        </p:nvSpPr>
+        <p:spPr>
+          <a:xfrm>
+            <a:off x="6812280" y="2377439"/>
+            <a:ext cx="548640" cy="164592"/>
+          </a:xfrm>
+          <a:prstGeom prst="rect">
+            <a:avLst/>
+          </a:prstGeom>
+          <a:noFill/>
+        </p:spPr>
+        <p:txBody>
+          <a:bodyPr wrap="none">
+            <a:spAutoFit/>
+          </a:bodyPr>
+          <a:lstStyle/>
+          <a:p>
+            <a:r>
+              <a:rPr sz="700"/>
+              <a:t>Count</a:t>
+            </a:r>
           </a:p>
         </p:txBody>
       </p:sp>
